--- a/Semana_3/Semana_3_Estandares_y_metricas_de_calidad.pptx
+++ b/Semana_3/Semana_3_Estandares_y_metricas_de_calidad.pptx
@@ -6668,7 +6668,7 @@
         </p:blipFill>
         <p:spPr>
           <a:xfrm rot="16200000">
-            <a:off x="2886895" y="-439248"/>
+            <a:off x="3437402" y="-439248"/>
             <a:ext cx="4485577" cy="8249698"/>
           </a:xfrm>
           <a:prstGeom prst="rect">
